--- a/data/Fall2026/dGLN3/stem/dGLN3 STEM Results.pptx
+++ b/data/Fall2026/dGLN3/stem/dGLN3 STEM Results.pptx
@@ -3487,10 +3487,10 @@
       </p:sp>
       <p:pic>
         <p:nvPicPr>
-          <p:cNvPr id="5" name="Content Placeholder 4">
-            <a:extLst>
-              <a:ext uri="{FF2B5EF4-FFF2-40B4-BE49-F238E27FC236}">
-                <a16:creationId xmlns:a16="http://schemas.microsoft.com/office/drawing/2014/main" id="{1BB767F1-4F4F-439E-B92B-F9911D77C1D9}"/>
+          <p:cNvPr id="9" name="Content Placeholder 8">
+            <a:extLst>
+              <a:ext uri="{FF2B5EF4-FFF2-40B4-BE49-F238E27FC236}">
+                <a16:creationId xmlns:a16="http://schemas.microsoft.com/office/drawing/2014/main" id="{FA1ABFB8-A5FC-4947-9D8D-6B6603056F8B}"/>
               </a:ext>
             </a:extLst>
           </p:cNvPr>
@@ -3580,10 +3580,10 @@
       </p:sp>
       <p:pic>
         <p:nvPicPr>
-          <p:cNvPr id="5" name="Content Placeholder 4">
-            <a:extLst>
-              <a:ext uri="{FF2B5EF4-FFF2-40B4-BE49-F238E27FC236}">
-                <a16:creationId xmlns:a16="http://schemas.microsoft.com/office/drawing/2014/main" id="{92505F53-8E51-489A-8387-5BB1F1DA9AB6}"/>
+          <p:cNvPr id="9" name="Content Placeholder 8">
+            <a:extLst>
+              <a:ext uri="{FF2B5EF4-FFF2-40B4-BE49-F238E27FC236}">
+                <a16:creationId xmlns:a16="http://schemas.microsoft.com/office/drawing/2014/main" id="{C0B9BE06-E204-4300-9CA1-FC5E378F2319}"/>
               </a:ext>
             </a:extLst>
           </p:cNvPr>
@@ -3673,10 +3673,10 @@
       </p:sp>
       <p:pic>
         <p:nvPicPr>
-          <p:cNvPr id="5" name="Content Placeholder 4">
-            <a:extLst>
-              <a:ext uri="{FF2B5EF4-FFF2-40B4-BE49-F238E27FC236}">
-                <a16:creationId xmlns:a16="http://schemas.microsoft.com/office/drawing/2014/main" id="{403C7A5B-C8A1-4910-BF58-18AA719F4EE9}"/>
+          <p:cNvPr id="9" name="Content Placeholder 8">
+            <a:extLst>
+              <a:ext uri="{FF2B5EF4-FFF2-40B4-BE49-F238E27FC236}">
+                <a16:creationId xmlns:a16="http://schemas.microsoft.com/office/drawing/2014/main" id="{A387A0EF-5629-4900-8FE6-E1F166DDDC9B}"/>
               </a:ext>
             </a:extLst>
           </p:cNvPr>
@@ -3766,10 +3766,10 @@
       </p:sp>
       <p:pic>
         <p:nvPicPr>
-          <p:cNvPr id="5" name="Content Placeholder 4">
-            <a:extLst>
-              <a:ext uri="{FF2B5EF4-FFF2-40B4-BE49-F238E27FC236}">
-                <a16:creationId xmlns:a16="http://schemas.microsoft.com/office/drawing/2014/main" id="{61E0AD13-0AB2-460D-BB5C-2C529613DF17}"/>
+          <p:cNvPr id="9" name="Content Placeholder 8">
+            <a:extLst>
+              <a:ext uri="{FF2B5EF4-FFF2-40B4-BE49-F238E27FC236}">
+                <a16:creationId xmlns:a16="http://schemas.microsoft.com/office/drawing/2014/main" id="{2476401D-51FB-4B74-8F33-66894830FB70}"/>
               </a:ext>
             </a:extLst>
           </p:cNvPr>
@@ -3859,10 +3859,10 @@
       </p:sp>
       <p:pic>
         <p:nvPicPr>
-          <p:cNvPr id="5" name="Content Placeholder 4">
-            <a:extLst>
-              <a:ext uri="{FF2B5EF4-FFF2-40B4-BE49-F238E27FC236}">
-                <a16:creationId xmlns:a16="http://schemas.microsoft.com/office/drawing/2014/main" id="{DD56A06F-77F2-402C-B036-80518C31D484}"/>
+          <p:cNvPr id="9" name="Content Placeholder 8">
+            <a:extLst>
+              <a:ext uri="{FF2B5EF4-FFF2-40B4-BE49-F238E27FC236}">
+                <a16:creationId xmlns:a16="http://schemas.microsoft.com/office/drawing/2014/main" id="{4179C444-0994-4323-8FFD-F2827160A1BD}"/>
               </a:ext>
             </a:extLst>
           </p:cNvPr>
@@ -3952,10 +3952,10 @@
       </p:sp>
       <p:pic>
         <p:nvPicPr>
-          <p:cNvPr id="5" name="Content Placeholder 4">
-            <a:extLst>
-              <a:ext uri="{FF2B5EF4-FFF2-40B4-BE49-F238E27FC236}">
-                <a16:creationId xmlns:a16="http://schemas.microsoft.com/office/drawing/2014/main" id="{44D9DEEA-608B-4005-A2F7-FE3657D41409}"/>
+          <p:cNvPr id="9" name="Content Placeholder 8">
+            <a:extLst>
+              <a:ext uri="{FF2B5EF4-FFF2-40B4-BE49-F238E27FC236}">
+                <a16:creationId xmlns:a16="http://schemas.microsoft.com/office/drawing/2014/main" id="{E27C24DD-49C9-418F-80EE-3EBAF72A5BCA}"/>
               </a:ext>
             </a:extLst>
           </p:cNvPr>
@@ -4045,10 +4045,10 @@
       </p:sp>
       <p:pic>
         <p:nvPicPr>
-          <p:cNvPr id="5" name="Content Placeholder 4">
-            <a:extLst>
-              <a:ext uri="{FF2B5EF4-FFF2-40B4-BE49-F238E27FC236}">
-                <a16:creationId xmlns:a16="http://schemas.microsoft.com/office/drawing/2014/main" id="{2B1703C7-76DE-4A16-B077-596B7E886CDC}"/>
+          <p:cNvPr id="9" name="Content Placeholder 8">
+            <a:extLst>
+              <a:ext uri="{FF2B5EF4-FFF2-40B4-BE49-F238E27FC236}">
+                <a16:creationId xmlns:a16="http://schemas.microsoft.com/office/drawing/2014/main" id="{6606727B-F532-4478-93F1-D97C03D5FA4F}"/>
               </a:ext>
             </a:extLst>
           </p:cNvPr>
@@ -4138,10 +4138,10 @@
       </p:sp>
       <p:pic>
         <p:nvPicPr>
-          <p:cNvPr id="5" name="Content Placeholder 4">
-            <a:extLst>
-              <a:ext uri="{FF2B5EF4-FFF2-40B4-BE49-F238E27FC236}">
-                <a16:creationId xmlns:a16="http://schemas.microsoft.com/office/drawing/2014/main" id="{2225D9F1-81A0-4173-8A7C-D39BFB2B3CE0}"/>
+          <p:cNvPr id="9" name="Content Placeholder 8">
+            <a:extLst>
+              <a:ext uri="{FF2B5EF4-FFF2-40B4-BE49-F238E27FC236}">
+                <a16:creationId xmlns:a16="http://schemas.microsoft.com/office/drawing/2014/main" id="{2330299C-7739-4007-A41D-90ADA176D581}"/>
               </a:ext>
             </a:extLst>
           </p:cNvPr>
@@ -4231,10 +4231,10 @@
       </p:sp>
       <p:pic>
         <p:nvPicPr>
-          <p:cNvPr id="5" name="Content Placeholder 4">
-            <a:extLst>
-              <a:ext uri="{FF2B5EF4-FFF2-40B4-BE49-F238E27FC236}">
-                <a16:creationId xmlns:a16="http://schemas.microsoft.com/office/drawing/2014/main" id="{08397EC2-3109-4EC6-A9FA-09A81C9FF82E}"/>
+          <p:cNvPr id="9" name="Content Placeholder 8">
+            <a:extLst>
+              <a:ext uri="{FF2B5EF4-FFF2-40B4-BE49-F238E27FC236}">
+                <a16:creationId xmlns:a16="http://schemas.microsoft.com/office/drawing/2014/main" id="{05710C85-A15D-4A38-BA1D-E95207469541}"/>
               </a:ext>
             </a:extLst>
           </p:cNvPr>
@@ -4324,10 +4324,10 @@
       </p:sp>
       <p:pic>
         <p:nvPicPr>
-          <p:cNvPr id="5" name="Content Placeholder 4">
-            <a:extLst>
-              <a:ext uri="{FF2B5EF4-FFF2-40B4-BE49-F238E27FC236}">
-                <a16:creationId xmlns:a16="http://schemas.microsoft.com/office/drawing/2014/main" id="{D6E15899-AE34-47D7-B7DD-A24295CC8AC8}"/>
+          <p:cNvPr id="9" name="Content Placeholder 8">
+            <a:extLst>
+              <a:ext uri="{FF2B5EF4-FFF2-40B4-BE49-F238E27FC236}">
+                <a16:creationId xmlns:a16="http://schemas.microsoft.com/office/drawing/2014/main" id="{FB14D342-4B19-42EE-BA2F-C37CC603EBDC}"/>
               </a:ext>
             </a:extLst>
           </p:cNvPr>
@@ -4417,10 +4417,10 @@
       </p:sp>
       <p:pic>
         <p:nvPicPr>
-          <p:cNvPr id="5" name="Content Placeholder 4">
-            <a:extLst>
-              <a:ext uri="{FF2B5EF4-FFF2-40B4-BE49-F238E27FC236}">
-                <a16:creationId xmlns:a16="http://schemas.microsoft.com/office/drawing/2014/main" id="{C4331598-237E-4DC0-B01C-47537A3549A1}"/>
+          <p:cNvPr id="9" name="Content Placeholder 8">
+            <a:extLst>
+              <a:ext uri="{FF2B5EF4-FFF2-40B4-BE49-F238E27FC236}">
+                <a16:creationId xmlns:a16="http://schemas.microsoft.com/office/drawing/2014/main" id="{8C6381D7-0F2A-435C-9263-33D375515E79}"/>
               </a:ext>
             </a:extLst>
           </p:cNvPr>
